--- a/Esame/Presentazione_Esame.pptx
+++ b/Esame/Presentazione_Esame.pptx
@@ -2187,8 +2187,8 @@
           </a:prstGeom>
         </p:spPr>
       </p:pic>
-      <mc:AlternateContent xmlns:mc="http://schemas.openxmlformats.org/markup-compatibility/2006">
-        <mc:Choice xmlns:a14="http://schemas.microsoft.com/office/drawing/2010/main" Requires="a14">
+      <mc:AlternateContent xmlns:mc="http://schemas.openxmlformats.org/markup-compatibility/2006" xmlns:a14="http://schemas.microsoft.com/office/drawing/2010/main">
+        <mc:Choice Requires="a14">
           <p:sp>
             <p:nvSpPr>
               <p:cNvPr id="2" name="CasellaDiTesto 1">
@@ -2203,7 +2203,7 @@
             </p:nvSpPr>
             <p:spPr>
               <a:xfrm>
-                <a:off x="272924" y="1412746"/>
+                <a:off x="272923" y="778264"/>
                 <a:ext cx="8598152" cy="2318007"/>
               </a:xfrm>
               <a:prstGeom prst="rect">
@@ -2369,7 +2369,7 @@
             </p:txBody>
           </p:sp>
         </mc:Choice>
-        <mc:Fallback>
+        <mc:Fallback xmlns="">
           <p:sp>
             <p:nvSpPr>
               <p:cNvPr id="2" name="CasellaDiTesto 1">
@@ -2386,7 +2386,7 @@
             </p:nvSpPr>
             <p:spPr>
               <a:xfrm>
-                <a:off x="272924" y="1412746"/>
+                <a:off x="272923" y="778264"/>
                 <a:ext cx="8598152" cy="2318007"/>
               </a:xfrm>
               <a:prstGeom prst="rect">
@@ -2414,6 +2414,131 @@
           </p:sp>
         </mc:Fallback>
       </mc:AlternateContent>
+      <p:sp>
+        <p:nvSpPr>
+          <p:cNvPr id="3" name="SetupBg">
+            <a:extLst>
+              <a:ext uri="{FF2B5EF4-FFF2-40B4-BE49-F238E27FC236}">
+                <a16:creationId xmlns:a16="http://schemas.microsoft.com/office/drawing/2014/main" id="{E044D240-5FC3-E660-16AC-C0AB61F6D647}"/>
+              </a:ext>
+            </a:extLst>
+          </p:cNvPr>
+          <p:cNvSpPr/>
+          <p:nvPr/>
+        </p:nvSpPr>
+        <p:spPr>
+          <a:xfrm>
+            <a:off x="391885" y="3415786"/>
+            <a:ext cx="8360229" cy="1205977"/>
+          </a:xfrm>
+          <a:prstGeom prst="rect">
+            <a:avLst/>
+          </a:prstGeom>
+          <a:solidFill>
+            <a:srgbClr val="EBF0F7"/>
+          </a:solidFill>
+          <a:ln w="9525">
+            <a:solidFill>
+              <a:srgbClr val="1B3D7D"/>
+            </a:solidFill>
+          </a:ln>
+        </p:spPr>
+        <p:txBody>
+          <a:bodyPr/>
+          <a:lstStyle/>
+          <a:p>
+            <a:pPr algn="ctr"/>
+            <a:r>
+              <a:rPr lang="it-IT" sz="1400" b="1" dirty="0">
+                <a:solidFill>
+                  <a:srgbClr val="002060"/>
+                </a:solidFill>
+              </a:rPr>
+              <a:t>Casi documentati in letteratura</a:t>
+            </a:r>
+          </a:p>
+          <a:p>
+            <a:pPr marL="285750" indent="-285750">
+              <a:buFont typeface="Arial" panose="020B0604020202020204" pitchFamily="34" charset="0"/>
+              <a:buChar char="•"/>
+            </a:pPr>
+            <a:r>
+              <a:rPr lang="it-IT" sz="1400" b="1" dirty="0">
+                <a:hlinkClick r:id="rId5">
+                  <a:extLst>
+                    <a:ext uri="{A12FA001-AC4F-418D-AE19-62706E023703}">
+                      <ahyp:hlinkClr xmlns:ahyp="http://schemas.microsoft.com/office/drawing/2018/hyperlinkcolor" val="tx"/>
+                    </a:ext>
+                  </a:extLst>
+                </a:hlinkClick>
+              </a:rPr>
+              <a:t>Ambroise &amp; McLachlan (2002) </a:t>
+            </a:r>
+            <a:r>
+              <a:rPr lang="it-IT" sz="1400" dirty="0"/>
+              <a:t>— studi di classificazione di tumori su microarray con AUC altissima perdono quasi tutta la capacità predittiva quando la feature </a:t>
+            </a:r>
+            <a:r>
+              <a:rPr lang="it-IT" sz="1400" dirty="0" err="1"/>
+              <a:t>selection</a:t>
+            </a:r>
+            <a:r>
+              <a:rPr lang="it-IT" sz="1400" dirty="0"/>
+              <a:t> viene spostata dentro la CV</a:t>
+            </a:r>
+          </a:p>
+          <a:p>
+            <a:pPr marL="285750" indent="-285750">
+              <a:buFont typeface="Arial" panose="020B0604020202020204" pitchFamily="34" charset="0"/>
+              <a:buChar char="•"/>
+            </a:pPr>
+            <a:r>
+              <a:rPr lang="it-IT" sz="1400" b="1" dirty="0">
+                <a:hlinkClick r:id="rId6">
+                  <a:extLst>
+                    <a:ext uri="{A12FA001-AC4F-418D-AE19-62706E023703}">
+                      <ahyp:hlinkClr xmlns:ahyp="http://schemas.microsoft.com/office/drawing/2018/hyperlinkcolor" val="tx"/>
+                    </a:ext>
+                  </a:extLst>
+                </a:hlinkClick>
+              </a:rPr>
+              <a:t>Simon et al. (2003)</a:t>
+            </a:r>
+            <a:r>
+              <a:rPr lang="it-IT" sz="1400" dirty="0">
+                <a:hlinkClick r:id="rId6">
+                  <a:extLst>
+                    <a:ext uri="{A12FA001-AC4F-418D-AE19-62706E023703}">
+                      <ahyp:hlinkClr xmlns:ahyp="http://schemas.microsoft.com/office/drawing/2018/hyperlinkcolor" val="tx"/>
+                    </a:ext>
+                  </a:extLst>
+                </a:hlinkClick>
+              </a:rPr>
+              <a:t> </a:t>
+            </a:r>
+            <a:r>
+              <a:rPr lang="it-IT" sz="1400" dirty="0"/>
+              <a:t>— analisi sistematica di pubblicazioni genomiche su riviste ad alto impatto: la maggior parte usava la pipeline errata; il </a:t>
+            </a:r>
+            <a:r>
+              <a:rPr lang="it-IT" sz="1400" dirty="0" err="1"/>
+              <a:t>bias</a:t>
+            </a:r>
+            <a:r>
+              <a:rPr lang="it-IT" sz="1400" dirty="0"/>
+              <a:t> di </a:t>
+            </a:r>
+            <a:r>
+              <a:rPr lang="it-IT" sz="1400" dirty="0" err="1"/>
+              <a:t>pre</a:t>
+            </a:r>
+            <a:r>
+              <a:rPr lang="it-IT" sz="1400" dirty="0"/>
+              <a:t>-selezione spiega gran parte dei risultati "significativi"</a:t>
+            </a:r>
+          </a:p>
+        </p:txBody>
+      </p:sp>
     </p:spTree>
     <p:extLst>
       <p:ext uri="{BB962C8B-B14F-4D97-AF65-F5344CB8AC3E}">
@@ -2544,7 +2669,7 @@
         <p:spPr>
           <a:xfrm>
             <a:off x="359764" y="1048256"/>
-            <a:ext cx="8559999" cy="3600986"/>
+            <a:ext cx="8559999" cy="3170099"/>
           </a:xfrm>
           <a:prstGeom prst="rect">
             <a:avLst/>
@@ -2565,54 +2690,50 @@
               <a:buChar char="•"/>
             </a:pPr>
             <a:r>
-              <a:rPr lang="it-IT" sz="2000" dirty="0">
-                <a:ea typeface="Calibri"/>
-                <a:cs typeface="Calibri"/>
-              </a:rPr>
-              <a:t>Slides del corso riguardanti </a:t>
-            </a:r>
-            <a:r>
-              <a:rPr lang="it-IT" sz="2000" i="1" dirty="0">
-                <a:ea typeface="Calibri"/>
-                <a:cs typeface="Calibri"/>
-              </a:rPr>
-              <a:t>Random Forest</a:t>
-            </a:r>
-            <a:r>
-              <a:rPr lang="it-IT" sz="2000" dirty="0">
-                <a:ea typeface="Calibri"/>
-                <a:cs typeface="Calibri"/>
-              </a:rPr>
-              <a:t> e </a:t>
-            </a:r>
-            <a:r>
-              <a:rPr lang="it-IT" sz="2000" i="1" dirty="0" err="1">
-                <a:ea typeface="Calibri"/>
-                <a:cs typeface="Calibri"/>
-              </a:rPr>
-              <a:t>Variable</a:t>
-            </a:r>
-            <a:r>
-              <a:rPr lang="it-IT" sz="2000" i="1" dirty="0">
-                <a:ea typeface="Calibri"/>
-                <a:cs typeface="Calibri"/>
-              </a:rPr>
-              <a:t> </a:t>
-            </a:r>
-            <a:r>
-              <a:rPr lang="it-IT" sz="2000" i="1" dirty="0" err="1">
-                <a:ea typeface="Calibri"/>
-                <a:cs typeface="Calibri"/>
-              </a:rPr>
-              <a:t>Importance</a:t>
-            </a:r>
-            <a:endParaRPr lang="it-IT" sz="2000" i="1" dirty="0">
-              <a:ea typeface="Calibri"/>
-              <a:cs typeface="Calibri"/>
-            </a:endParaRPr>
+              <a:rPr lang="it-IT" sz="2000" dirty="0"/>
+              <a:t>Ambroise &amp; McLachlan (2002) - </a:t>
+            </a:r>
+            <a:r>
+              <a:rPr lang="en-US" sz="2000" dirty="0"/>
+              <a:t>Selection bias in gene extraction on the basis of microarray gene-expression data</a:t>
+            </a:r>
           </a:p>
           <a:p>
-            <a:endParaRPr lang="it-IT" sz="2000" i="1" dirty="0">
+            <a:endParaRPr lang="it-IT" sz="2000" dirty="0"/>
+          </a:p>
+          <a:p>
+            <a:pPr marL="285750" indent="-285750">
+              <a:buFont typeface="Arial" panose="020B0604020202020204" pitchFamily="34" charset="0"/>
+              <a:buChar char="•"/>
+            </a:pPr>
+            <a:r>
+              <a:rPr lang="it-IT" sz="2000" dirty="0"/>
+              <a:t>Simon et al. (2003) - </a:t>
+            </a:r>
+            <a:r>
+              <a:rPr lang="en-US" sz="2000" dirty="0"/>
+              <a:t>Pitfalls in the Use of DNA Microarray Data for Diagnostic and Prognostic Classification</a:t>
+            </a:r>
+          </a:p>
+          <a:p>
+            <a:endParaRPr lang="en-US" sz="2000" dirty="0"/>
+          </a:p>
+          <a:p>
+            <a:pPr marL="285750" indent="-285750">
+              <a:buFont typeface="Arial" panose="020B0604020202020204" pitchFamily="34" charset="0"/>
+              <a:buChar char="•"/>
+            </a:pPr>
+            <a:r>
+              <a:rPr lang="en-US" sz="2000" dirty="0"/>
+              <a:t>Medium - How cross-validation can go wrong and how to fix it</a:t>
+            </a:r>
+          </a:p>
+          <a:p>
+            <a:pPr marL="285750" indent="-285750">
+              <a:buFont typeface="Arial" panose="020B0604020202020204" pitchFamily="34" charset="0"/>
+              <a:buChar char="•"/>
+            </a:pPr>
+            <a:endParaRPr lang="it-IT" sz="2000" dirty="0">
               <a:ea typeface="Calibri"/>
               <a:cs typeface="Calibri"/>
             </a:endParaRPr>
@@ -2623,161 +2744,16 @@
               <a:buChar char="•"/>
             </a:pPr>
             <a:r>
-              <a:rPr lang="it-IT" sz="2000" dirty="0"/>
-              <a:t>Strobl, C., Boulesteix, A.-L., </a:t>
-            </a:r>
-            <a:r>
-              <a:rPr lang="it-IT" sz="2000" dirty="0" err="1"/>
-              <a:t>Zeileis</a:t>
-            </a:r>
-            <a:r>
-              <a:rPr lang="it-IT" sz="2000" dirty="0"/>
-              <a:t>, A., </a:t>
-            </a:r>
-            <a:r>
-              <a:rPr lang="it-IT" sz="2000" dirty="0" err="1"/>
-              <a:t>Hothorn</a:t>
-            </a:r>
-            <a:r>
-              <a:rPr lang="it-IT" sz="2000" dirty="0"/>
-              <a:t>, T. (2007). </a:t>
-            </a:r>
-            <a:r>
-              <a:rPr lang="it-IT" i="1" dirty="0"/>
-              <a:t>Bias in Random Forest </a:t>
-            </a:r>
-            <a:r>
-              <a:rPr lang="it-IT" i="1" dirty="0" err="1"/>
-              <a:t>Variable</a:t>
-            </a:r>
-            <a:r>
-              <a:rPr lang="it-IT" i="1" dirty="0"/>
-              <a:t> </a:t>
-            </a:r>
-            <a:r>
-              <a:rPr lang="it-IT" i="1" dirty="0" err="1"/>
-              <a:t>Importance</a:t>
-            </a:r>
-            <a:r>
-              <a:rPr lang="it-IT" i="1" dirty="0"/>
-              <a:t> Measures: </a:t>
-            </a:r>
-            <a:r>
-              <a:rPr lang="it-IT" i="1" dirty="0" err="1"/>
-              <a:t>Illustrations</a:t>
-            </a:r>
-            <a:r>
-              <a:rPr lang="it-IT" i="1" dirty="0"/>
-              <a:t>, Sources and a Solution. BMC </a:t>
-            </a:r>
-            <a:r>
-              <a:rPr lang="it-IT" i="1" dirty="0" err="1"/>
-              <a:t>Bioinformatics</a:t>
-            </a:r>
-            <a:r>
-              <a:rPr lang="it-IT" i="1" dirty="0"/>
-              <a:t>, 8, 25.</a:t>
-            </a:r>
-          </a:p>
-          <a:p>
-            <a:endParaRPr lang="it-IT" i="1" dirty="0"/>
-          </a:p>
-          <a:p>
-            <a:pPr marL="285750" indent="-285750">
-              <a:buFont typeface="Arial" panose="020B0604020202020204" pitchFamily="34" charset="0"/>
-              <a:buChar char="•"/>
-            </a:pPr>
-            <a:r>
-              <a:rPr lang="it-IT" sz="2000" dirty="0"/>
-              <a:t>Strobl, C., Boulesteix, A.-L., Kneib, T., Augustin, T., </a:t>
-            </a:r>
-            <a:r>
-              <a:rPr lang="it-IT" sz="2000" dirty="0" err="1"/>
-              <a:t>Zeileis</a:t>
-            </a:r>
-            <a:r>
-              <a:rPr lang="it-IT" sz="2000" dirty="0"/>
-              <a:t>, A. (2008). </a:t>
-            </a:r>
-            <a:r>
-              <a:rPr lang="it-IT" i="1" dirty="0" err="1"/>
-              <a:t>Conditional</a:t>
-            </a:r>
-            <a:r>
-              <a:rPr lang="it-IT" i="1" dirty="0"/>
-              <a:t> </a:t>
-            </a:r>
-            <a:r>
-              <a:rPr lang="it-IT" i="1" dirty="0" err="1"/>
-              <a:t>Variable</a:t>
-            </a:r>
-            <a:r>
-              <a:rPr lang="it-IT" i="1" dirty="0"/>
-              <a:t> </a:t>
-            </a:r>
-            <a:r>
-              <a:rPr lang="it-IT" i="1" dirty="0" err="1"/>
-              <a:t>Importance</a:t>
-            </a:r>
-            <a:r>
-              <a:rPr lang="it-IT" i="1" dirty="0"/>
-              <a:t> for Random </a:t>
-            </a:r>
-            <a:r>
-              <a:rPr lang="it-IT" i="1" dirty="0" err="1"/>
-              <a:t>Forests</a:t>
-            </a:r>
-            <a:r>
-              <a:rPr lang="it-IT" i="1" dirty="0"/>
-              <a:t>. BMC </a:t>
-            </a:r>
-            <a:r>
-              <a:rPr lang="it-IT" i="1" dirty="0" err="1"/>
-              <a:t>Bioinformatics</a:t>
-            </a:r>
-            <a:r>
-              <a:rPr lang="it-IT" i="1" dirty="0"/>
-              <a:t>, 9, 307.</a:t>
-            </a:r>
-          </a:p>
-          <a:p>
-            <a:pPr marL="285750" indent="-285750">
-              <a:buFont typeface="Arial" panose="020B0604020202020204" pitchFamily="34" charset="0"/>
-              <a:buChar char="•"/>
-            </a:pPr>
-            <a:endParaRPr lang="it-IT" i="1" dirty="0"/>
-          </a:p>
-          <a:p>
-            <a:pPr marL="285750" indent="-285750">
-              <a:buFont typeface="Arial" panose="020B0604020202020204" pitchFamily="34" charset="0"/>
-              <a:buChar char="•"/>
-            </a:pPr>
-            <a:r>
-              <a:rPr lang="it-IT" i="1" dirty="0">
-                <a:hlinkClick r:id="rId4"/>
-              </a:rPr>
-              <a:t>https://erwanscornet.github.io/talks/mdi.pdf</a:t>
-            </a:r>
-            <a:r>
-              <a:rPr lang="it-IT" i="1" dirty="0"/>
-              <a:t> </a:t>
-            </a:r>
-          </a:p>
-          <a:p>
-            <a:endParaRPr lang="it-IT" sz="2000" i="1" dirty="0"/>
-          </a:p>
-          <a:p>
-            <a:pPr marL="285750" indent="-285750">
-              <a:buFont typeface="Arial" panose="020B0604020202020204" pitchFamily="34" charset="0"/>
-              <a:buChar char="•"/>
-            </a:pPr>
-            <a:r>
               <a:rPr lang="it-IT" sz="2000" dirty="0">
                 <a:ea typeface="Calibri"/>
                 <a:cs typeface="Calibri"/>
               </a:rPr>
-              <a:t>Claude per aiuto sul codice e impaginazione slide</a:t>
-            </a:r>
+              <a:t>Claude e Gemini per ricavare la formula teorica e per supporto nella stesura e revisione</a:t>
+            </a:r>
+            <a:endParaRPr lang="en-US" sz="2000" dirty="0">
+              <a:ea typeface="Calibri"/>
+              <a:cs typeface="Calibri"/>
+            </a:endParaRPr>
           </a:p>
         </p:txBody>
       </p:sp>
@@ -3180,8 +3156,8 @@
           </a:fontRef>
         </p:style>
       </p:cxnSp>
-      <mc:AlternateContent xmlns:mc="http://schemas.openxmlformats.org/markup-compatibility/2006">
-        <mc:Choice xmlns:a14="http://schemas.microsoft.com/office/drawing/2010/main" Requires="a14">
+      <mc:AlternateContent xmlns:mc="http://schemas.openxmlformats.org/markup-compatibility/2006" xmlns:a14="http://schemas.microsoft.com/office/drawing/2010/main">
+        <mc:Choice Requires="a14">
           <p:sp>
             <p:nvSpPr>
               <p:cNvPr id="13" name="CasellaDiTesto 12">
@@ -3508,7 +3484,7 @@
             </p:txBody>
           </p:sp>
         </mc:Choice>
-        <mc:Fallback>
+        <mc:Fallback xmlns="">
           <p:sp>
             <p:nvSpPr>
               <p:cNvPr id="13" name="CasellaDiTesto 12">
@@ -3591,8 +3567,8 @@
           </a:p>
         </p:txBody>
       </p:sp>
-      <mc:AlternateContent xmlns:mc="http://schemas.openxmlformats.org/markup-compatibility/2006">
-        <mc:Choice xmlns:a14="http://schemas.microsoft.com/office/drawing/2010/main" Requires="a14">
+      <mc:AlternateContent xmlns:mc="http://schemas.openxmlformats.org/markup-compatibility/2006" xmlns:a14="http://schemas.microsoft.com/office/drawing/2010/main">
+        <mc:Choice Requires="a14">
           <p:sp>
             <p:nvSpPr>
               <p:cNvPr id="15" name="CasellaDiTesto 14">
@@ -3670,6 +3646,7 @@
                 <a:endParaRPr lang="it-IT" sz="1400" dirty="0"/>
               </a:p>
               <a:p>
+                <a:pPr/>
                 <a14:m>
                   <m:oMathPara xmlns:m="http://schemas.openxmlformats.org/officeDocument/2006/math">
                     <m:oMathParaPr>
@@ -3873,7 +3850,7 @@
             </p:txBody>
           </p:sp>
         </mc:Choice>
-        <mc:Fallback>
+        <mc:Fallback xmlns="">
           <p:sp>
             <p:nvSpPr>
               <p:cNvPr id="15" name="CasellaDiTesto 14">
@@ -4262,8 +4239,8 @@
           </a:p>
         </p:txBody>
       </p:sp>
-      <mc:AlternateContent xmlns:mc="http://schemas.openxmlformats.org/markup-compatibility/2006">
-        <mc:Choice xmlns:a14="http://schemas.microsoft.com/office/drawing/2010/main" Requires="a14">
+      <mc:AlternateContent xmlns:mc="http://schemas.openxmlformats.org/markup-compatibility/2006" xmlns:a14="http://schemas.microsoft.com/office/drawing/2010/main">
+        <mc:Choice Requires="a14">
           <p:sp>
             <p:nvSpPr>
               <p:cNvPr id="2" name="CasellaDiTesto 1">
@@ -4487,7 +4464,7 @@
             </p:txBody>
           </p:sp>
         </mc:Choice>
-        <mc:Fallback>
+        <mc:Fallback xmlns="">
           <p:sp>
             <p:nvSpPr>
               <p:cNvPr id="2" name="CasellaDiTesto 1">
@@ -4570,8 +4547,8 @@
           </a:p>
         </p:txBody>
       </p:sp>
-      <mc:AlternateContent xmlns:mc="http://schemas.openxmlformats.org/markup-compatibility/2006">
-        <mc:Choice xmlns:a14="http://schemas.microsoft.com/office/drawing/2010/main" Requires="a14">
+      <mc:AlternateContent xmlns:mc="http://schemas.openxmlformats.org/markup-compatibility/2006" xmlns:a14="http://schemas.microsoft.com/office/drawing/2010/main">
+        <mc:Choice Requires="a14">
           <p:sp>
             <p:nvSpPr>
               <p:cNvPr id="16" name="CasellaDiTesto 15">
@@ -4819,7 +4796,7 @@
             </p:txBody>
           </p:sp>
         </mc:Choice>
-        <mc:Fallback>
+        <mc:Fallback xmlns="">
           <p:sp>
             <p:nvSpPr>
               <p:cNvPr id="16" name="CasellaDiTesto 15">
@@ -5306,8 +5283,8 @@
           </a:p>
         </p:txBody>
       </p:sp>
-      <mc:AlternateContent xmlns:mc="http://schemas.openxmlformats.org/markup-compatibility/2006">
-        <mc:Choice xmlns:a14="http://schemas.microsoft.com/office/drawing/2010/main" Requires="a14">
+      <mc:AlternateContent xmlns:mc="http://schemas.openxmlformats.org/markup-compatibility/2006" xmlns:a14="http://schemas.microsoft.com/office/drawing/2010/main">
+        <mc:Choice Requires="a14">
           <p:sp>
             <p:nvSpPr>
               <p:cNvPr id="17" name="SetupBg">
@@ -5373,6 +5350,7 @@
                 </a:r>
               </a:p>
               <a:p>
+                <a:pPr/>
                 <a14:m>
                   <m:oMathPara xmlns:m="http://schemas.openxmlformats.org/officeDocument/2006/math">
                     <m:oMathParaPr>
@@ -5612,7 +5590,7 @@
             </p:txBody>
           </p:sp>
         </mc:Choice>
-        <mc:Fallback>
+        <mc:Fallback xmlns="">
           <p:sp>
             <p:nvSpPr>
               <p:cNvPr id="17" name="SetupBg">
@@ -6653,8 +6631,8 @@
           </a:p>
         </p:txBody>
       </p:sp>
-      <mc:AlternateContent xmlns:mc="http://schemas.openxmlformats.org/markup-compatibility/2006">
-        <mc:Choice xmlns:a14="http://schemas.microsoft.com/office/drawing/2010/main" Requires="a14">
+      <mc:AlternateContent xmlns:mc="http://schemas.openxmlformats.org/markup-compatibility/2006" xmlns:a14="http://schemas.microsoft.com/office/drawing/2010/main">
+        <mc:Choice Requires="a14">
           <p:sp>
             <p:nvSpPr>
               <p:cNvPr id="14" name="SetupBg">
@@ -6688,6 +6666,7 @@
               <a:bodyPr/>
               <a:lstStyle/>
               <a:p>
+                <a:pPr/>
                 <a14:m>
                   <m:oMathPara xmlns:m="http://schemas.openxmlformats.org/officeDocument/2006/math">
                     <m:oMathParaPr>
@@ -6697,7 +6676,7 @@
                       <m:func>
                         <m:funcPr>
                           <m:ctrlPr>
-                            <a:rPr lang="it-IT" sz="1600" b="1" i="0" smtClean="0">
+                            <a:rPr lang="it-IT" sz="1600" b="1" i="1" smtClean="0">
                               <a:latin typeface="Cambria Math" panose="02040503050406030204" pitchFamily="18" charset="0"/>
                             </a:rPr>
                           </m:ctrlPr>
@@ -6829,7 +6808,7 @@
                               <m:func>
                                 <m:funcPr>
                                   <m:ctrlPr>
-                                    <a:rPr lang="it-IT" sz="1600" b="1" i="0">
+                                    <a:rPr lang="it-IT" sz="1600" b="1" i="1">
                                       <a:latin typeface="Cambria Math" panose="02040503050406030204" pitchFamily="18" charset="0"/>
                                     </a:rPr>
                                   </m:ctrlPr>
@@ -6871,7 +6850,7 @@
             </p:txBody>
           </p:sp>
         </mc:Choice>
-        <mc:Fallback>
+        <mc:Fallback xmlns="">
           <p:sp>
             <p:nvSpPr>
               <p:cNvPr id="14" name="SetupBg">
@@ -6921,8 +6900,8 @@
           </p:sp>
         </mc:Fallback>
       </mc:AlternateContent>
-      <mc:AlternateContent xmlns:mc="http://schemas.openxmlformats.org/markup-compatibility/2006">
-        <mc:Choice xmlns:a14="http://schemas.microsoft.com/office/drawing/2010/main" Requires="a14">
+      <mc:AlternateContent xmlns:mc="http://schemas.openxmlformats.org/markup-compatibility/2006" xmlns:a14="http://schemas.microsoft.com/office/drawing/2010/main">
+        <mc:Choice Requires="a14">
           <p:sp>
             <p:nvSpPr>
               <p:cNvPr id="17" name="CasellaDiTesto 16">
@@ -7479,7 +7458,7 @@
             </p:txBody>
           </p:sp>
         </mc:Choice>
-        <mc:Fallback>
+        <mc:Fallback xmlns="">
           <p:sp>
             <p:nvSpPr>
               <p:cNvPr id="17" name="CasellaDiTesto 16">
@@ -7898,8 +7877,8 @@
           </a:prstGeom>
         </p:spPr>
       </p:pic>
-      <mc:AlternateContent xmlns:mc="http://schemas.openxmlformats.org/markup-compatibility/2006">
-        <mc:Choice xmlns:a14="http://schemas.microsoft.com/office/drawing/2010/main" Requires="a14">
+      <mc:AlternateContent xmlns:mc="http://schemas.openxmlformats.org/markup-compatibility/2006" xmlns:a14="http://schemas.microsoft.com/office/drawing/2010/main">
+        <mc:Choice Requires="a14">
           <p:sp>
             <p:nvSpPr>
               <p:cNvPr id="8" name="CasellaDiTesto 7">
@@ -8079,7 +8058,7 @@
             </p:txBody>
           </p:sp>
         </mc:Choice>
-        <mc:Fallback>
+        <mc:Fallback xmlns="">
           <p:sp>
             <p:nvSpPr>
               <p:cNvPr id="8" name="CasellaDiTesto 7">
@@ -8554,8 +8533,8 @@
           </a:p>
         </p:txBody>
       </p:sp>
-      <mc:AlternateContent xmlns:mc="http://schemas.openxmlformats.org/markup-compatibility/2006">
-        <mc:Choice xmlns:a14="http://schemas.microsoft.com/office/drawing/2010/main" Requires="a14">
+      <mc:AlternateContent xmlns:mc="http://schemas.openxmlformats.org/markup-compatibility/2006" xmlns:a14="http://schemas.microsoft.com/office/drawing/2010/main">
+        <mc:Choice Requires="a14">
           <p:sp>
             <p:nvSpPr>
               <p:cNvPr id="8" name="CasellaDiTesto 7">
@@ -8713,7 +8692,7 @@
             </p:txBody>
           </p:sp>
         </mc:Choice>
-        <mc:Fallback>
+        <mc:Fallback xmlns="">
           <p:sp>
             <p:nvSpPr>
               <p:cNvPr id="8" name="CasellaDiTesto 7">
@@ -9026,8 +9005,8 @@
           </a:p>
         </p:txBody>
       </p:sp>
-      <mc:AlternateContent xmlns:mc="http://schemas.openxmlformats.org/markup-compatibility/2006">
-        <mc:Choice xmlns:a14="http://schemas.microsoft.com/office/drawing/2010/main" Requires="a14">
+      <mc:AlternateContent xmlns:mc="http://schemas.openxmlformats.org/markup-compatibility/2006" xmlns:a14="http://schemas.microsoft.com/office/drawing/2010/main">
+        <mc:Choice Requires="a14">
           <p:sp>
             <p:nvSpPr>
               <p:cNvPr id="8" name="CasellaDiTesto 7">
@@ -9178,7 +9157,7 @@
             </p:txBody>
           </p:sp>
         </mc:Choice>
-        <mc:Fallback>
+        <mc:Fallback xmlns="">
           <p:sp>
             <p:nvSpPr>
               <p:cNvPr id="8" name="CasellaDiTesto 7">

--- a/Esame/Presentazione_Esame.pptx
+++ b/Esame/Presentazione_Esame.pptx
@@ -4524,7 +4524,7 @@
         <p:spPr>
           <a:xfrm>
             <a:off x="4708109" y="1794748"/>
-            <a:ext cx="4253011" cy="3019126"/>
+            <a:ext cx="4291815" cy="3019126"/>
           </a:xfrm>
           <a:prstGeom prst="rect">
             <a:avLst/>
@@ -8143,21 +8143,8 @@
                   <a:srgbClr val="002060"/>
                 </a:solidFill>
               </a:rPr>
-              <a:t>Motivo della </a:t>
-            </a:r>
-            <a:r>
-              <a:rPr lang="it-IT" sz="1400" b="1" dirty="0" err="1">
-                <a:solidFill>
-                  <a:srgbClr val="002060"/>
-                </a:solidFill>
-              </a:rPr>
-              <a:t>sovastima</a:t>
-            </a:r>
-            <a:endParaRPr lang="it-IT" sz="1400" b="1" dirty="0">
-              <a:solidFill>
-                <a:srgbClr val="002060"/>
-              </a:solidFill>
-            </a:endParaRPr>
+              <a:t>Motivo della sovrastima</a:t>
+            </a:r>
           </a:p>
           <a:p>
             <a:pPr marL="285750" indent="-285750">
@@ -9991,20 +9978,20 @@
 </file>
 
 <file path=customXml/item1.xml><?xml version="1.0" encoding="utf-8"?>
+<p:properties xmlns:p="http://schemas.microsoft.com/office/2006/metadata/properties" xmlns:xsi="http://www.w3.org/2001/XMLSchema-instance" xmlns:pc="http://schemas.microsoft.com/office/infopath/2007/PartnerControls">
+  <documentManagement>
+    <_activity xmlns="df5b7411-0bd9-441c-a587-7944a4ab8ce9" xsi:nil="true"/>
+  </documentManagement>
+</p:properties>
+</file>
+
+<file path=customXml/item2.xml><?xml version="1.0" encoding="utf-8"?>
 <?mso-contentType ?>
 <FormTemplates xmlns="http://schemas.microsoft.com/sharepoint/v3/contenttype/forms">
   <Display>DocumentLibraryForm</Display>
   <Edit>DocumentLibraryForm</Edit>
   <New>DocumentLibraryForm</New>
 </FormTemplates>
-</file>
-
-<file path=customXml/item2.xml><?xml version="1.0" encoding="utf-8"?>
-<p:properties xmlns:p="http://schemas.microsoft.com/office/2006/metadata/properties" xmlns:xsi="http://www.w3.org/2001/XMLSchema-instance" xmlns:pc="http://schemas.microsoft.com/office/infopath/2007/PartnerControls">
-  <documentManagement>
-    <_activity xmlns="df5b7411-0bd9-441c-a587-7944a4ab8ce9" xsi:nil="true"/>
-  </documentManagement>
-</p:properties>
 </file>
 
 <file path=customXml/item3.xml><?xml version="1.0" encoding="utf-8"?>
@@ -10182,14 +10169,6 @@
 </file>
 
 <file path=customXml/itemProps1.xml><?xml version="1.0" encoding="utf-8"?>
-<ds:datastoreItem xmlns:ds="http://schemas.openxmlformats.org/officeDocument/2006/customXml" ds:itemID="{5F6E7083-04CE-4148-8822-E3F79A2926B6}">
-  <ds:schemaRefs>
-    <ds:schemaRef ds:uri="http://schemas.microsoft.com/sharepoint/v3/contenttype/forms"/>
-  </ds:schemaRefs>
-</ds:datastoreItem>
-</file>
-
-<file path=customXml/itemProps2.xml><?xml version="1.0" encoding="utf-8"?>
 <ds:datastoreItem xmlns:ds="http://schemas.openxmlformats.org/officeDocument/2006/customXml" ds:itemID="{B3AD13D0-A941-4301-90CA-BF751F48A029}">
   <ds:schemaRefs>
     <ds:schemaRef ds:uri="http://purl.org/dc/dcmitype/"/>
@@ -10201,6 +10180,14 @@
     <ds:schemaRef ds:uri="http://schemas.openxmlformats.org/package/2006/metadata/core-properties"/>
     <ds:schemaRef ds:uri="http://schemas.microsoft.com/office/2006/metadata/properties"/>
     <ds:schemaRef ds:uri="http://purl.org/dc/elements/1.1/"/>
+  </ds:schemaRefs>
+</ds:datastoreItem>
+</file>
+
+<file path=customXml/itemProps2.xml><?xml version="1.0" encoding="utf-8"?>
+<ds:datastoreItem xmlns:ds="http://schemas.openxmlformats.org/officeDocument/2006/customXml" ds:itemID="{5F6E7083-04CE-4148-8822-E3F79A2926B6}">
+  <ds:schemaRefs>
+    <ds:schemaRef ds:uri="http://schemas.microsoft.com/sharepoint/v3/contenttype/forms"/>
   </ds:schemaRefs>
 </ds:datastoreItem>
 </file>
